--- a/Agentes/Flávia/SendFlow - Comunidade WhatsApp - Apresentação.pptx
+++ b/Agentes/Flávia/SendFlow - Comunidade WhatsApp - Apresentação.pptx
@@ -4211,14 +4211,6 @@
 <file path=ppt/slides/slide1.xml><?xml version="1.0" encoding="utf-8"?>
 <p:sld xmlns:a="http://schemas.openxmlformats.org/drawingml/2006/main" xmlns:p="http://schemas.openxmlformats.org/presentationml/2006/main" xmlns:r="http://schemas.openxmlformats.org/officeDocument/2006/relationships">
   <p:cSld>
-    <p:bg>
-      <p:bgPr>
-        <a:solidFill>
-          <a:srgbClr val="1F2937"/>
-        </a:solidFill>
-        <a:effectLst/>
-      </p:bgPr>
-    </p:bg>
     <p:spTree>
       <p:nvGrpSpPr>
         <p:cNvPr id="1" name=""/>
@@ -5022,14 +5014,35 @@
       <p:grpSpPr/>
       <p:sp>
         <p:nvSpPr>
-          <p:cNvPr id="2" name="Rounded Rectangle 1"/>
+          <p:cNvPr id="2" name="Title 1"/>
+          <p:cNvSpPr>
+            <a:spLocks noGrp="1"/>
+          </p:cNvSpPr>
+          <p:nvPr>
+            <p:ph type="title"/>
+          </p:nvPr>
+        </p:nvSpPr>
+        <p:spPr/>
+        <p:txBody>
+          <a:bodyPr/>
+          <a:lstStyle/>
+          <a:p>
+            <a:r>
+              <a:t>O funil</a:t>
+            </a:r>
+          </a:p>
+        </p:txBody>
+      </p:sp>
+      <p:sp>
+        <p:nvSpPr>
+          <p:cNvPr id="3" name="Rounded Rectangle 2"/>
           <p:cNvSpPr/>
           <p:nvPr/>
         </p:nvSpPr>
         <p:spPr>
           <a:xfrm>
-            <a:off x="457200" y="2377440"/>
-            <a:ext cx="2103120" cy="1828800"/>
+            <a:off x="457200" y="2194560"/>
+            <a:ext cx="2103120" cy="1463040"/>
           </a:xfrm>
           <a:prstGeom prst="roundRect">
             <a:avLst/>
@@ -5065,23 +5078,18 @@
               <a:t>GRUPO</a:t>
             </a:r>
           </a:p>
-          <a:p>
-            <a:r>
-              <a:t>conteúdo em escala</a:t>
-            </a:r>
-          </a:p>
-        </p:txBody>
-      </p:sp>
-      <p:sp>
-        <p:nvSpPr>
-          <p:cNvPr id="3" name="Rounded Rectangle 2"/>
+        </p:txBody>
+      </p:sp>
+      <p:sp>
+        <p:nvSpPr>
+          <p:cNvPr id="4" name="Rounded Rectangle 3"/>
           <p:cNvSpPr/>
           <p:nvPr/>
         </p:nvSpPr>
         <p:spPr>
           <a:xfrm>
-            <a:off x="2834640" y="2377440"/>
-            <a:ext cx="2103120" cy="1828800"/>
+            <a:off x="2834640" y="2194560"/>
+            <a:ext cx="2103120" cy="1463040"/>
           </a:xfrm>
           <a:prstGeom prst="roundRect">
             <a:avLst/>
@@ -5117,23 +5125,18 @@
               <a:t>INTERESSE</a:t>
             </a:r>
           </a:p>
-          <a:p>
-            <a:r>
-              <a:t>cliente levanta a mão</a:t>
-            </a:r>
-          </a:p>
-        </p:txBody>
-      </p:sp>
-      <p:sp>
-        <p:nvSpPr>
-          <p:cNvPr id="4" name="Rounded Rectangle 3"/>
+        </p:txBody>
+      </p:sp>
+      <p:sp>
+        <p:nvSpPr>
+          <p:cNvPr id="5" name="Rounded Rectangle 4"/>
           <p:cNvSpPr/>
           <p:nvPr/>
         </p:nvSpPr>
         <p:spPr>
           <a:xfrm>
-            <a:off x="5212080" y="2377440"/>
-            <a:ext cx="2103120" cy="1828800"/>
+            <a:off x="5212080" y="2194560"/>
+            <a:ext cx="2103120" cy="1463040"/>
           </a:xfrm>
           <a:prstGeom prst="roundRect">
             <a:avLst/>
@@ -5169,23 +5172,18 @@
               <a:t>PRIVADO</a:t>
             </a:r>
           </a:p>
-          <a:p>
-            <a:r>
-              <a:t>Octadesk</a:t>
-            </a:r>
-          </a:p>
-        </p:txBody>
-      </p:sp>
-      <p:sp>
-        <p:nvSpPr>
-          <p:cNvPr id="5" name="Rounded Rectangle 4"/>
+        </p:txBody>
+      </p:sp>
+      <p:sp>
+        <p:nvSpPr>
+          <p:cNvPr id="6" name="Rounded Rectangle 5"/>
           <p:cNvSpPr/>
           <p:nvPr/>
         </p:nvSpPr>
         <p:spPr>
           <a:xfrm>
-            <a:off x="7589520" y="2377440"/>
-            <a:ext cx="2103120" cy="1828800"/>
+            <a:off x="7589520" y="2194560"/>
+            <a:ext cx="2103120" cy="1463040"/>
           </a:xfrm>
           <a:prstGeom prst="roundRect">
             <a:avLst/>
@@ -5221,23 +5219,18 @@
               <a:t>VENDEDOR</a:t>
             </a:r>
           </a:p>
-          <a:p>
-            <a:r>
-              <a:t>atendimento</a:t>
-            </a:r>
-          </a:p>
-        </p:txBody>
-      </p:sp>
-      <p:sp>
-        <p:nvSpPr>
-          <p:cNvPr id="6" name="Rounded Rectangle 5"/>
+        </p:txBody>
+      </p:sp>
+      <p:sp>
+        <p:nvSpPr>
+          <p:cNvPr id="7" name="Rounded Rectangle 6"/>
           <p:cNvSpPr/>
           <p:nvPr/>
         </p:nvSpPr>
         <p:spPr>
           <a:xfrm>
-            <a:off x="9966960" y="2377440"/>
-            <a:ext cx="1737360" cy="1828800"/>
+            <a:off x="9966960" y="2194560"/>
+            <a:ext cx="1737360" cy="1463040"/>
           </a:xfrm>
           <a:prstGeom prst="roundRect">
             <a:avLst/>
@@ -5273,9 +5266,51 @@
               <a:t>PEDIDO</a:t>
             </a:r>
           </a:p>
-          <a:p>
-            <a:r>
-              <a:t>ERP</a:t>
+        </p:txBody>
+      </p:sp>
+      <p:sp>
+        <p:nvSpPr>
+          <p:cNvPr id="8" name="Rectangle 7"/>
+          <p:cNvSpPr/>
+          <p:nvPr/>
+        </p:nvSpPr>
+        <p:spPr>
+          <a:xfrm>
+            <a:off x="457200" y="4206240"/>
+            <a:ext cx="11247120" cy="822960"/>
+          </a:xfrm>
+          <a:prstGeom prst="rect">
+            <a:avLst/>
+          </a:prstGeom>
+          <a:solidFill>
+            <a:srgbClr val="F3F4F6"/>
+          </a:solidFill>
+        </p:spPr>
+        <p:style>
+          <a:lnRef idx="1">
+            <a:schemeClr val="accent1"/>
+          </a:lnRef>
+          <a:fillRef idx="3">
+            <a:schemeClr val="accent1"/>
+          </a:fillRef>
+          <a:effectRef idx="2">
+            <a:schemeClr val="accent1"/>
+          </a:effectRef>
+          <a:fontRef idx="minor">
+            <a:schemeClr val="lt1"/>
+          </a:fontRef>
+        </p:style>
+        <p:txBody>
+          <a:bodyPr rtlCol="0" anchor="ctr"/>
+          <a:lstStyle/>
+          <a:p>
+            <a:r>
+              <a:rPr>
+                <a:solidFill>
+                  <a:srgbClr val="111827"/>
+                </a:solidFill>
+              </a:rPr>
+              <a:t>conteúdo em escala  →  cliente levanta a mão  →  Octadesk (1:1)  →  atendimento  →  ERP</a:t>
             </a:r>
           </a:p>
         </p:txBody>
